--- a/docs/OSSPolicyGuard_Dev_Guide.pptx
+++ b/docs/OSSPolicyGuard_Dev_Guide.pptx
@@ -2087,7 +2087,7 @@
                 <a:ea typeface="Calibri" pitchFamily="34" charset="-122"/>
                 <a:cs typeface="Calibri" pitchFamily="34" charset="-120"/>
               </a:rPr>
-              <a:t>Surya Nalluri · Aluri</a:t>
+              <a:t>Surya Nalluri</a:t>
             </a:r>
             <a:endParaRPr lang="en-US" sz="1400" dirty="0"/>
           </a:p>
@@ -2165,7 +2165,7 @@
                 <a:ea typeface="Calibri" pitchFamily="34" charset="-122"/>
                 <a:cs typeface="Calibri" pitchFamily="34" charset="-120"/>
               </a:rPr>
-              <a:t>Surya Nalluri · Aluri</a:t>
+              <a:t>Surya Nalluri</a:t>
             </a:r>
             <a:endParaRPr lang="en-US" sz="900" dirty="0"/>
           </a:p>
@@ -3118,7 +3118,7 @@
                 <a:ea typeface="Calibri" pitchFamily="34" charset="-122"/>
                 <a:cs typeface="Calibri" pitchFamily="34" charset="-120"/>
               </a:rPr>
-              <a:t>Surya Nalluri · Aluri</a:t>
+              <a:t>Surya Nalluri</a:t>
             </a:r>
             <a:endParaRPr lang="en-US" sz="900" dirty="0"/>
           </a:p>
@@ -3720,7 +3720,7 @@
                 <a:ea typeface="Calibri" pitchFamily="34" charset="-122"/>
                 <a:cs typeface="Calibri" pitchFamily="34" charset="-120"/>
               </a:rPr>
-              <a:t>Surya Nalluri · Aluri</a:t>
+              <a:t>Surya Nalluri</a:t>
             </a:r>
             <a:endParaRPr lang="en-US" sz="900" dirty="0"/>
           </a:p>
@@ -4594,7 +4594,7 @@
                 <a:ea typeface="Calibri" pitchFamily="34" charset="-122"/>
                 <a:cs typeface="Calibri" pitchFamily="34" charset="-120"/>
               </a:rPr>
-              <a:t>Leadership: Surya Nalluri · Aluri</a:t>
+              <a:t>Leadership: Surya Nalluri</a:t>
             </a:r>
             <a:endParaRPr lang="en-US" sz="1050" dirty="0"/>
           </a:p>
@@ -4633,7 +4633,7 @@
                 <a:ea typeface="Calibri" pitchFamily="34" charset="-122"/>
                 <a:cs typeface="Calibri" pitchFamily="34" charset="-120"/>
               </a:rPr>
-              <a:t>Surya Nalluri · Aluri</a:t>
+              <a:t>Surya Nalluri</a:t>
             </a:r>
             <a:endParaRPr lang="en-US" sz="900" dirty="0"/>
           </a:p>
@@ -6090,7 +6090,7 @@
                 <a:ea typeface="Calibri" pitchFamily="34" charset="-122"/>
                 <a:cs typeface="Calibri" pitchFamily="34" charset="-120"/>
               </a:rPr>
-              <a:t>Surya Nalluri · Aluri</a:t>
+              <a:t>Surya Nalluri</a:t>
             </a:r>
             <a:endParaRPr lang="en-US" sz="900" dirty="0"/>
           </a:p>
@@ -6498,7 +6498,7 @@
                 <a:ea typeface="Calibri" pitchFamily="34" charset="-122"/>
                 <a:cs typeface="Calibri" pitchFamily="34" charset="-120"/>
               </a:rPr>
-              <a:t>Surya Nalluri · Aluri</a:t>
+              <a:t>Surya Nalluri</a:t>
             </a:r>
             <a:endParaRPr lang="en-US" sz="900" dirty="0"/>
           </a:p>
@@ -7354,7 +7354,7 @@
                 <a:ea typeface="Calibri" pitchFamily="34" charset="-122"/>
                 <a:cs typeface="Calibri" pitchFamily="34" charset="-120"/>
               </a:rPr>
-              <a:t>Surya Nalluri · Aluri</a:t>
+              <a:t>Surya Nalluri</a:t>
             </a:r>
             <a:endParaRPr lang="en-US" sz="900" dirty="0"/>
           </a:p>
@@ -8406,7 +8406,7 @@
                 <a:ea typeface="Calibri" pitchFamily="34" charset="-122"/>
                 <a:cs typeface="Calibri" pitchFamily="34" charset="-120"/>
               </a:rPr>
-              <a:t>Surya Nalluri · Aluri</a:t>
+              <a:t>Surya Nalluri</a:t>
             </a:r>
             <a:endParaRPr lang="en-US" sz="900" dirty="0"/>
           </a:p>
@@ -9300,7 +9300,7 @@
                 <a:ea typeface="Calibri" pitchFamily="34" charset="-122"/>
                 <a:cs typeface="Calibri" pitchFamily="34" charset="-120"/>
               </a:rPr>
-              <a:t>Surya Nalluri · Aluri</a:t>
+              <a:t>Surya Nalluri</a:t>
             </a:r>
             <a:endParaRPr lang="en-US" sz="900" dirty="0"/>
           </a:p>
@@ -10288,7 +10288,7 @@
                 <a:ea typeface="Calibri" pitchFamily="34" charset="-122"/>
                 <a:cs typeface="Calibri" pitchFamily="34" charset="-120"/>
               </a:rPr>
-              <a:t>Surya Nalluri · Aluri</a:t>
+              <a:t>Surya Nalluri</a:t>
             </a:r>
             <a:endParaRPr lang="en-US" sz="900" dirty="0"/>
           </a:p>
@@ -11270,7 +11270,7 @@
                 <a:ea typeface="Calibri" pitchFamily="34" charset="-122"/>
                 <a:cs typeface="Calibri" pitchFamily="34" charset="-120"/>
               </a:rPr>
-              <a:t>Surya Nalluri · Aluri</a:t>
+              <a:t>Surya Nalluri</a:t>
             </a:r>
             <a:endParaRPr lang="en-US" sz="900" dirty="0"/>
           </a:p>
@@ -12141,7 +12141,7 @@
                 <a:ea typeface="Calibri" pitchFamily="34" charset="-122"/>
                 <a:cs typeface="Calibri" pitchFamily="34" charset="-120"/>
               </a:rPr>
-              <a:t>Surya Nalluri · Aluri</a:t>
+              <a:t>Surya Nalluri</a:t>
             </a:r>
             <a:endParaRPr lang="en-US" sz="900" dirty="0"/>
           </a:p>
@@ -13615,7 +13615,7 @@
                 <a:ea typeface="Calibri" pitchFamily="34" charset="-122"/>
                 <a:cs typeface="Calibri" pitchFamily="34" charset="-120"/>
               </a:rPr>
-              <a:t>Surya Nalluri · Aluri</a:t>
+              <a:t>Surya Nalluri</a:t>
             </a:r>
             <a:endParaRPr lang="en-US" sz="900" dirty="0"/>
           </a:p>
